--- a/presentation-build/2026-03-20-llm-multi-agent-orchestration/qwen3-multi-agent-orchestration.pptx
+++ b/presentation-build/2026-03-20-llm-multi-agent-orchestration/qwen3-multi-agent-orchestration.pptx
@@ -7224,7 +7224,7 @@
         </p:nvGraphicFramePr>
         <p:xfrm>
           <a:off x="548640" y="1645920"/>
-          <a:ext cx="11091672" cy="914400"/>
+          <a:ext cx="11091672" cy="1935480"/>
         </p:xfrm>
         <a:graphic>
           <a:graphicData uri="http://schemas.openxmlformats.org/drawingml/2006/table">
@@ -10728,7 +10728,7 @@
         </p:nvGraphicFramePr>
         <p:xfrm>
           <a:off x="548640" y="1645920"/>
-          <a:ext cx="11091672" cy="914400"/>
+          <a:ext cx="11091672" cy="1767840"/>
         </p:xfrm>
         <a:graphic>
           <a:graphicData uri="http://schemas.openxmlformats.org/drawingml/2006/table">
@@ -13073,7 +13073,7 @@
         </p:nvGraphicFramePr>
         <p:xfrm>
           <a:off x="548640" y="1645920"/>
-          <a:ext cx="11091672" cy="914400"/>
+          <a:ext cx="11091672" cy="1767840"/>
         </p:xfrm>
         <a:graphic>
           <a:graphicData uri="http://schemas.openxmlformats.org/drawingml/2006/table">
@@ -17385,7 +17385,7 @@
         </p:nvGraphicFramePr>
         <p:xfrm>
           <a:off x="548640" y="1645920"/>
-          <a:ext cx="11091672" cy="914400"/>
+          <a:ext cx="11091672" cy="1473200"/>
         </p:xfrm>
         <a:graphic>
           <a:graphicData uri="http://schemas.openxmlformats.org/drawingml/2006/table">
@@ -19175,7 +19175,7 @@
         <p:spPr>
           <a:xfrm>
             <a:off x="548640" y="594360"/>
-            <a:ext cx="9144000" cy="548640"/>
+            <a:ext cx="10424160" cy="548640"/>
           </a:xfrm>
           <a:prstGeom prst="rect">
             <a:avLst/>
@@ -19493,7 +19493,7 @@
         </p:nvGraphicFramePr>
         <p:xfrm>
           <a:off x="548640" y="1645920"/>
-          <a:ext cx="11091672" cy="914400"/>
+          <a:ext cx="11091670" cy="2560320"/>
         </p:xfrm>
         <a:graphic>
           <a:graphicData uri="http://schemas.openxmlformats.org/drawingml/2006/table">
@@ -22023,8 +22023,8 @@
         </p:nvSpPr>
         <p:spPr>
           <a:xfrm>
-            <a:off x="548640" y="594360"/>
-            <a:ext cx="9144000" cy="548640"/>
+            <a:off x="548639" y="594360"/>
+            <a:ext cx="10622943" cy="548640"/>
           </a:xfrm>
           <a:prstGeom prst="rect">
             <a:avLst/>
@@ -24892,7 +24892,7 @@
         <p:spPr>
           <a:xfrm>
             <a:off x="548640" y="594360"/>
-            <a:ext cx="9144000" cy="548640"/>
+            <a:ext cx="10543430" cy="548640"/>
           </a:xfrm>
           <a:prstGeom prst="rect">
             <a:avLst/>
@@ -24938,7 +24938,7 @@
         </p:nvGraphicFramePr>
         <p:xfrm>
           <a:off x="548640" y="1645920"/>
-          <a:ext cx="11091672" cy="914400"/>
+          <a:ext cx="11091672" cy="2062480"/>
         </p:xfrm>
         <a:graphic>
           <a:graphicData uri="http://schemas.openxmlformats.org/drawingml/2006/table">
@@ -27266,7 +27266,7 @@
         </p:nvGraphicFramePr>
         <p:xfrm>
           <a:off x="548640" y="1645920"/>
-          <a:ext cx="11091672" cy="914400"/>
+          <a:ext cx="11091672" cy="2062480"/>
         </p:xfrm>
         <a:graphic>
           <a:graphicData uri="http://schemas.openxmlformats.org/drawingml/2006/table">
@@ -32972,7 +32972,7 @@
         <p:spPr>
           <a:xfrm>
             <a:off x="548640" y="594360"/>
-            <a:ext cx="9144000" cy="548640"/>
+            <a:ext cx="10145864" cy="548640"/>
           </a:xfrm>
           <a:prstGeom prst="rect">
             <a:avLst/>
@@ -34207,8 +34207,8 @@
         </p:nvSpPr>
         <p:spPr>
           <a:xfrm>
-            <a:off x="548640" y="594360"/>
-            <a:ext cx="9144000" cy="548640"/>
+            <a:off x="548639" y="594360"/>
+            <a:ext cx="10066351" cy="548640"/>
           </a:xfrm>
           <a:prstGeom prst="rect">
             <a:avLst/>
@@ -34526,7 +34526,7 @@
         </p:nvGraphicFramePr>
         <p:xfrm>
           <a:off x="548640" y="1645920"/>
-          <a:ext cx="11091672" cy="914400"/>
+          <a:ext cx="11091672" cy="2062480"/>
         </p:xfrm>
         <a:graphic>
           <a:graphicData uri="http://schemas.openxmlformats.org/drawingml/2006/table">
@@ -36366,7 +36366,7 @@
         </p:nvGraphicFramePr>
         <p:xfrm>
           <a:off x="548640" y="1645920"/>
-          <a:ext cx="11091672" cy="914400"/>
+          <a:ext cx="11091672" cy="2798064"/>
         </p:xfrm>
         <a:graphic>
           <a:graphicData uri="http://schemas.openxmlformats.org/drawingml/2006/table">
@@ -38197,7 +38197,7 @@
         </p:nvGraphicFramePr>
         <p:xfrm>
           <a:off x="548640" y="1645920"/>
-          <a:ext cx="11091672" cy="914400"/>
+          <a:ext cx="11091672" cy="1178560"/>
         </p:xfrm>
         <a:graphic>
           <a:graphicData uri="http://schemas.openxmlformats.org/drawingml/2006/table">
@@ -41875,7 +41875,7 @@
         </p:nvGraphicFramePr>
         <p:xfrm>
           <a:off x="548640" y="1645920"/>
-          <a:ext cx="11091672" cy="914400"/>
+          <a:ext cx="11091672" cy="1767840"/>
         </p:xfrm>
         <a:graphic>
           <a:graphicData uri="http://schemas.openxmlformats.org/drawingml/2006/table">
@@ -44020,8 +44020,8 @@
         </p:nvSpPr>
         <p:spPr>
           <a:xfrm>
-            <a:off x="548640" y="594360"/>
-            <a:ext cx="9144000" cy="548640"/>
+            <a:off x="548639" y="594360"/>
+            <a:ext cx="10165743" cy="548640"/>
           </a:xfrm>
           <a:prstGeom prst="rect">
             <a:avLst/>
@@ -47700,7 +47700,7 @@
         <p:spPr>
           <a:xfrm>
             <a:off x="548640" y="594360"/>
-            <a:ext cx="9144000" cy="548640"/>
+            <a:ext cx="10086230" cy="548640"/>
           </a:xfrm>
           <a:prstGeom prst="rect">
             <a:avLst/>
@@ -47746,7 +47746,7 @@
         </p:nvGraphicFramePr>
         <p:xfrm>
           <a:off x="548640" y="1645920"/>
-          <a:ext cx="11091672" cy="914400"/>
+          <a:ext cx="11091672" cy="2062480"/>
         </p:xfrm>
         <a:graphic>
           <a:graphicData uri="http://schemas.openxmlformats.org/drawingml/2006/table">
